--- a/docs/lectures/lecture_03/03_lecture_powerpoint.pptx
+++ b/docs/lectures/lecture_03/03_lecture_powerpoint.pptx
@@ -6,6 +6,9 @@
   </p:sldMasterIdLst>
   <p:sldIdLst>
     <p:sldId id="256" r:id="rId2"/>
+    <p:sldId id="257" r:id="rId3"/>
+    <p:sldId id="258" r:id="rId4"/>
+    <p:sldId id="259" r:id="rId5"/>
   </p:sldIdLst>
   <p:sldSz cx="9144000" cy="5143500" type="screen16x9"/>
   <p:notesSz cx="6858000" cy="9144000"/>
@@ -3324,6 +3327,236 @@
             <a:r>
               <a:rPr/>
               <a:t>Bill Perry</a:t>
+            </a:r>
+          </a:p>
+        </p:txBody>
+      </p:sp>
+    </p:spTree>
+  </p:cSld>
+</p:sld>
+</file>
+
+<file path=ppt/slides/slide2.xml><?xml version="1.0" encoding="utf-8"?>
+<p:sld xmlns:a="http://schemas.openxmlformats.org/drawingml/2006/main" xmlns:r="http://schemas.openxmlformats.org/officeDocument/2006/relationships" xmlns:p="http://schemas.openxmlformats.org/presentationml/2006/main">
+  <p:cSld>
+    <p:spTree>
+      <p:nvGrpSpPr>
+        <p:cNvPr id="1" name=""/>
+        <p:cNvGrpSpPr/>
+        <p:nvPr/>
+      </p:nvGrpSpPr>
+      <p:grpSpPr>
+        <a:xfrm>
+          <a:off x="0" y="0"/>
+          <a:ext cx="0" cy="0"/>
+          <a:chOff x="0" y="0"/>
+          <a:chExt cx="0" cy="0"/>
+        </a:xfrm>
+      </p:grpSpPr>
+      <p:sp>
+        <p:nvSpPr>
+          <p:cNvPr id="2" name="Title 1"/>
+          <p:cNvSpPr>
+            <a:spLocks noGrp="1"/>
+          </p:cNvSpPr>
+          <p:nvPr>
+            <p:ph type="title"/>
+          </p:nvPr>
+        </p:nvSpPr>
+        <p:spPr>
+          <a:xfrm>
+            <a:off x="0" y="0"/>
+            <a:ext cx="9144000" cy="582780"/>
+          </a:xfrm>
+        </p:spPr>
+        <p:txBody>
+          <a:bodyPr/>
+          <a:lstStyle/>
+          <a:p>
+            <a:pPr lvl="0" indent="0" marL="0">
+              <a:buNone/>
+            </a:pPr>
+            <a:r>
+              <a:rPr/>
+              <a:t>Summary of Class:</a:t>
+            </a:r>
+          </a:p>
+        </p:txBody>
+      </p:sp>
+      <p:sp>
+        <p:nvSpPr>
+          <p:cNvPr id="3" name="Content Placeholder 2"/>
+          <p:cNvSpPr>
+            <a:spLocks noGrp="1"/>
+          </p:cNvSpPr>
+          <p:nvPr>
+            <p:ph idx="1"/>
+          </p:nvPr>
+        </p:nvSpPr>
+        <p:spPr/>
+        <p:txBody>
+          <a:bodyPr/>
+          <a:lstStyle/>
+          <a:p>
+            <a:pPr lvl="0"/>
+            <a:r>
+              <a:rPr/>
+              <a:t>point 1</a:t>
+            </a:r>
+          </a:p>
+          <a:p>
+            <a:pPr lvl="0"/>
+            <a:r>
+              <a:rPr/>
+              <a:t>point 2</a:t>
+            </a:r>
+          </a:p>
+          <a:p>
+            <a:pPr lvl="0"/>
+            <a:r>
+              <a:rPr/>
+              <a:t>point 3</a:t>
+            </a:r>
+          </a:p>
+        </p:txBody>
+      </p:sp>
+    </p:spTree>
+  </p:cSld>
+</p:sld>
+</file>
+
+<file path=ppt/slides/slide3.xml><?xml version="1.0" encoding="utf-8"?>
+<p:sld xmlns:a="http://schemas.openxmlformats.org/drawingml/2006/main" xmlns:r="http://schemas.openxmlformats.org/officeDocument/2006/relationships" xmlns:p="http://schemas.openxmlformats.org/presentationml/2006/main">
+  <p:cSld>
+    <p:spTree>
+      <p:nvGrpSpPr>
+        <p:cNvPr id="1" name=""/>
+        <p:cNvGrpSpPr/>
+        <p:nvPr/>
+      </p:nvGrpSpPr>
+      <p:grpSpPr>
+        <a:xfrm>
+          <a:off x="0" y="0"/>
+          <a:ext cx="0" cy="0"/>
+          <a:chOff x="0" y="0"/>
+          <a:chExt cx="0" cy="0"/>
+        </a:xfrm>
+      </p:grpSpPr>
+      <p:sp>
+        <p:nvSpPr>
+          <p:cNvPr id="2" name="Title 1"/>
+          <p:cNvSpPr>
+            <a:spLocks noGrp="1"/>
+          </p:cNvSpPr>
+          <p:nvPr>
+            <p:ph type="title"/>
+          </p:nvPr>
+        </p:nvSpPr>
+        <p:spPr>
+          <a:xfrm>
+            <a:off x="0" y="0"/>
+            <a:ext cx="9144000" cy="582780"/>
+          </a:xfrm>
+        </p:spPr>
+        <p:txBody>
+          <a:bodyPr/>
+          <a:lstStyle/>
+          <a:p>
+            <a:pPr lvl="0" indent="0" marL="0">
+              <a:buNone/>
+            </a:pPr>
+            <a:r>
+              <a:rPr/>
+              <a:t>Goals for today</a:t>
+            </a:r>
+          </a:p>
+        </p:txBody>
+      </p:sp>
+      <p:sp>
+        <p:nvSpPr>
+          <p:cNvPr id="3" name="Content Placeholder 2"/>
+          <p:cNvSpPr>
+            <a:spLocks noGrp="1"/>
+          </p:cNvSpPr>
+          <p:nvPr>
+            <p:ph idx="1"/>
+          </p:nvPr>
+        </p:nvSpPr>
+        <p:spPr/>
+        <p:txBody>
+          <a:bodyPr/>
+          <a:lstStyle/>
+          <a:p>
+            <a:pPr lvl="0"/>
+            <a:r>
+              <a:rPr/>
+              <a:t>point 1</a:t>
+            </a:r>
+          </a:p>
+          <a:p>
+            <a:pPr lvl="0"/>
+            <a:r>
+              <a:rPr/>
+              <a:t>point 2</a:t>
+            </a:r>
+          </a:p>
+          <a:p>
+            <a:pPr lvl="0"/>
+            <a:r>
+              <a:rPr/>
+              <a:t>point 3</a:t>
+            </a:r>
+          </a:p>
+        </p:txBody>
+      </p:sp>
+    </p:spTree>
+  </p:cSld>
+</p:sld>
+</file>
+
+<file path=ppt/slides/slide4.xml><?xml version="1.0" encoding="utf-8"?>
+<p:sld xmlns:a="http://schemas.openxmlformats.org/drawingml/2006/main" xmlns:r="http://schemas.openxmlformats.org/officeDocument/2006/relationships" xmlns:p="http://schemas.openxmlformats.org/presentationml/2006/main">
+  <p:cSld>
+    <p:spTree>
+      <p:nvGrpSpPr>
+        <p:cNvPr id="1" name=""/>
+        <p:cNvGrpSpPr/>
+        <p:nvPr/>
+      </p:nvGrpSpPr>
+      <p:grpSpPr>
+        <a:xfrm>
+          <a:off x="0" y="0"/>
+          <a:ext cx="0" cy="0"/>
+          <a:chOff x="0" y="0"/>
+          <a:chExt cx="0" cy="0"/>
+        </a:xfrm>
+      </p:grpSpPr>
+      <p:sp>
+        <p:nvSpPr>
+          <p:cNvPr id="2" name="Title 1"/>
+          <p:cNvSpPr>
+            <a:spLocks noGrp="1"/>
+          </p:cNvSpPr>
+          <p:nvPr>
+            <p:ph type="title"/>
+          </p:nvPr>
+        </p:nvSpPr>
+        <p:spPr>
+          <a:xfrm>
+            <a:off x="0" y="0"/>
+            <a:ext cx="9144000" cy="582780"/>
+          </a:xfrm>
+        </p:spPr>
+        <p:txBody>
+          <a:bodyPr/>
+          <a:lstStyle/>
+          <a:p>
+            <a:pPr lvl="0" indent="0" marL="0">
+              <a:buNone/>
+            </a:pPr>
+            <a:r>
+              <a:rPr/>
+              <a:t>Slide 1</a:t>
             </a:r>
           </a:p>
         </p:txBody>

--- a/docs/lectures/lecture_03/03_lecture_powerpoint.pptx
+++ b/docs/lectures/lecture_03/03_lecture_powerpoint.pptx
@@ -3369,7 +3369,7 @@
             </a:pPr>
             <a:r>
               <a:rPr/>
-              <a:t>2026-06-28</a:t>
+              <a:t>2026-06-30</a:t>
             </a:r>
           </a:p>
         </p:txBody>
@@ -4476,53 +4476,63 @@
             </a:r>
           </a:p>
           <a:p>
-            <a:pPr lvl="0" indent="0" marL="1270000">
-              <a:buNone/>
-            </a:pPr>
-            <a:r>
-              <a:rPr sz="2000"/>
+            <a:pPr lvl="0"/>
+            <a:r>
+              <a:rPr/>
               <a:t>Take </a:t>
             </a:r>
             <a:r>
-              <a:rPr sz="2000">
+              <a:rPr>
                 <a:latin typeface="Courier"/>
               </a:rPr>
               <a:t>tree_df</a:t>
             </a:r>
             <a:r>
-              <a:rPr sz="2000"/>
-              <a:t>, </a:t>
-            </a:r>
-            <a:r>
-              <a:rPr sz="2000" b="1"/>
+              <a:rPr/>
+              <a:t>,</a:t>
+            </a:r>
+          </a:p>
+          <a:p>
+            <a:pPr lvl="1"/>
+            <a:r>
+              <a:rPr b="1"/>
               <a:t>then</a:t>
             </a:r>
             <a:r>
-              <a:rPr sz="2000"/>
-              <a:t> filter to non-zero weights, </a:t>
-            </a:r>
-            <a:r>
-              <a:rPr sz="2000" b="1"/>
+              <a:rPr/>
+              <a:t> filter to non-zero weights,</a:t>
+            </a:r>
+          </a:p>
+          <a:p>
+            <a:pPr lvl="2"/>
+            <a:r>
+              <a:rPr b="1"/>
               <a:t>then</a:t>
             </a:r>
             <a:r>
-              <a:rPr sz="2000"/>
-              <a:t> select three columns, </a:t>
-            </a:r>
-            <a:r>
-              <a:rPr sz="2000" b="1"/>
+              <a:rPr/>
+              <a:t> select three columns,</a:t>
+            </a:r>
+          </a:p>
+          <a:p>
+            <a:pPr lvl="3"/>
+            <a:r>
+              <a:rPr b="1"/>
               <a:t>then</a:t>
             </a:r>
             <a:r>
-              <a:rPr sz="2000"/>
-              <a:t> add two new columns, </a:t>
-            </a:r>
-            <a:r>
-              <a:rPr sz="2000" b="1"/>
+              <a:rPr/>
+              <a:t> add two new columns,</a:t>
+            </a:r>
+          </a:p>
+          <a:p>
+            <a:pPr lvl="4"/>
+            <a:r>
+              <a:rPr b="1"/>
               <a:t>then</a:t>
             </a:r>
             <a:r>
-              <a:rPr sz="2000"/>
+              <a:rPr/>
               <a:t> sort by side and weight.</a:t>
             </a:r>
           </a:p>
@@ -4567,6 +4577,284 @@
       </p:sp>
     </p:spTree>
   </p:cSld>
+  <p:timing>
+    <p:tnLst>
+      <p:par>
+        <p:cTn id="1" dur="indefinite" restart="never" nodeType="tmRoot">
+          <p:childTnLst>
+            <p:seq concurrent="1" nextAc="seek">
+              <p:cTn id="2" dur="indefinite" nodeType="mainSeq">
+                <p:childTnLst>
+                  <p:par>
+                    <p:cTn id="3" fill="hold">
+                      <p:stCondLst>
+                        <p:cond delay="indefinite"/>
+                      </p:stCondLst>
+                      <p:childTnLst>
+                        <p:par>
+                          <p:cTn id="4" fill="hold">
+                            <p:stCondLst>
+                              <p:cond delay="0"/>
+                            </p:stCondLst>
+                            <p:childTnLst>
+                              <p:par>
+                                <p:cTn id="5" presetID="1" presetClass="entr" presetSubtype="0" fill="hold" grpId="0" nodeType="clickEffect">
+                                  <p:stCondLst>
+                                    <p:cond delay="0"/>
+                                  </p:stCondLst>
+                                  <p:childTnLst>
+                                    <p:set>
+                                      <p:cBhvr>
+                                        <p:cTn id="6" dur="1" fill="hold">
+                                          <p:stCondLst>
+                                            <p:cond delay="0"/>
+                                          </p:stCondLst>
+                                        </p:cTn>
+                                        <p:tgtEl>
+                                          <p:spTgt spid="4">
+                                            <p:txEl>
+                                              <p:pRg st="1" end="1"/>
+                                            </p:txEl>
+                                          </p:spTgt>
+                                        </p:tgtEl>
+                                        <p:attrNameLst>
+                                          <p:attrName>style.visibility</p:attrName>
+                                        </p:attrNameLst>
+                                      </p:cBhvr>
+                                      <p:to>
+                                        <p:strVal val="visible"/>
+                                      </p:to>
+                                    </p:set>
+                                  </p:childTnLst>
+                                </p:cTn>
+                              </p:par>
+                            </p:childTnLst>
+                          </p:cTn>
+                        </p:par>
+                      </p:childTnLst>
+                    </p:cTn>
+                  </p:par>
+                  <p:par>
+                    <p:cTn id="7" fill="hold">
+                      <p:stCondLst>
+                        <p:cond delay="indefinite"/>
+                      </p:stCondLst>
+                      <p:childTnLst>
+                        <p:par>
+                          <p:cTn id="8" fill="hold">
+                            <p:stCondLst>
+                              <p:cond delay="0"/>
+                            </p:stCondLst>
+                            <p:childTnLst>
+                              <p:par>
+                                <p:cTn id="9" presetID="1" presetClass="entr" presetSubtype="0" fill="hold" grpId="0" nodeType="clickEffect">
+                                  <p:stCondLst>
+                                    <p:cond delay="0"/>
+                                  </p:stCondLst>
+                                  <p:childTnLst>
+                                    <p:set>
+                                      <p:cBhvr>
+                                        <p:cTn id="10" dur="1" fill="hold">
+                                          <p:stCondLst>
+                                            <p:cond delay="0"/>
+                                          </p:stCondLst>
+                                        </p:cTn>
+                                        <p:tgtEl>
+                                          <p:spTgt spid="4">
+                                            <p:txEl>
+                                              <p:pRg st="2" end="2"/>
+                                            </p:txEl>
+                                          </p:spTgt>
+                                        </p:tgtEl>
+                                        <p:attrNameLst>
+                                          <p:attrName>style.visibility</p:attrName>
+                                        </p:attrNameLst>
+                                      </p:cBhvr>
+                                      <p:to>
+                                        <p:strVal val="visible"/>
+                                      </p:to>
+                                    </p:set>
+                                  </p:childTnLst>
+                                </p:cTn>
+                              </p:par>
+                            </p:childTnLst>
+                          </p:cTn>
+                        </p:par>
+                      </p:childTnLst>
+                    </p:cTn>
+                  </p:par>
+                  <p:par>
+                    <p:cTn id="11" fill="hold">
+                      <p:stCondLst>
+                        <p:cond delay="indefinite"/>
+                      </p:stCondLst>
+                      <p:childTnLst>
+                        <p:par>
+                          <p:cTn id="12" fill="hold">
+                            <p:stCondLst>
+                              <p:cond delay="0"/>
+                            </p:stCondLst>
+                            <p:childTnLst>
+                              <p:par>
+                                <p:cTn id="13" presetID="1" presetClass="entr" presetSubtype="0" fill="hold" grpId="0" nodeType="clickEffect">
+                                  <p:stCondLst>
+                                    <p:cond delay="0"/>
+                                  </p:stCondLst>
+                                  <p:childTnLst>
+                                    <p:set>
+                                      <p:cBhvr>
+                                        <p:cTn id="14" dur="1" fill="hold">
+                                          <p:stCondLst>
+                                            <p:cond delay="0"/>
+                                          </p:stCondLst>
+                                        </p:cTn>
+                                        <p:tgtEl>
+                                          <p:spTgt spid="4">
+                                            <p:txEl>
+                                              <p:pRg st="3" end="3"/>
+                                            </p:txEl>
+                                          </p:spTgt>
+                                        </p:tgtEl>
+                                        <p:attrNameLst>
+                                          <p:attrName>style.visibility</p:attrName>
+                                        </p:attrNameLst>
+                                      </p:cBhvr>
+                                      <p:to>
+                                        <p:strVal val="visible"/>
+                                      </p:to>
+                                    </p:set>
+                                  </p:childTnLst>
+                                </p:cTn>
+                              </p:par>
+                            </p:childTnLst>
+                          </p:cTn>
+                        </p:par>
+                      </p:childTnLst>
+                    </p:cTn>
+                  </p:par>
+                  <p:par>
+                    <p:cTn id="15" fill="hold">
+                      <p:stCondLst>
+                        <p:cond delay="indefinite"/>
+                      </p:stCondLst>
+                      <p:childTnLst>
+                        <p:par>
+                          <p:cTn id="16" fill="hold">
+                            <p:stCondLst>
+                              <p:cond delay="0"/>
+                            </p:stCondLst>
+                            <p:childTnLst>
+                              <p:par>
+                                <p:cTn id="17" presetID="1" presetClass="entr" presetSubtype="0" fill="hold" grpId="0" nodeType="clickEffect">
+                                  <p:stCondLst>
+                                    <p:cond delay="0"/>
+                                  </p:stCondLst>
+                                  <p:childTnLst>
+                                    <p:set>
+                                      <p:cBhvr>
+                                        <p:cTn id="18" dur="1" fill="hold">
+                                          <p:stCondLst>
+                                            <p:cond delay="0"/>
+                                          </p:stCondLst>
+                                        </p:cTn>
+                                        <p:tgtEl>
+                                          <p:spTgt spid="4">
+                                            <p:txEl>
+                                              <p:pRg st="4" end="4"/>
+                                            </p:txEl>
+                                          </p:spTgt>
+                                        </p:tgtEl>
+                                        <p:attrNameLst>
+                                          <p:attrName>style.visibility</p:attrName>
+                                        </p:attrNameLst>
+                                      </p:cBhvr>
+                                      <p:to>
+                                        <p:strVal val="visible"/>
+                                      </p:to>
+                                    </p:set>
+                                  </p:childTnLst>
+                                </p:cTn>
+                              </p:par>
+                            </p:childTnLst>
+                          </p:cTn>
+                        </p:par>
+                      </p:childTnLst>
+                    </p:cTn>
+                  </p:par>
+                  <p:par>
+                    <p:cTn id="19" fill="hold">
+                      <p:stCondLst>
+                        <p:cond delay="indefinite"/>
+                      </p:stCondLst>
+                      <p:childTnLst>
+                        <p:par>
+                          <p:cTn id="20" fill="hold">
+                            <p:stCondLst>
+                              <p:cond delay="0"/>
+                            </p:stCondLst>
+                            <p:childTnLst>
+                              <p:par>
+                                <p:cTn id="21" presetID="1" presetClass="entr" presetSubtype="0" fill="hold" grpId="0" nodeType="clickEffect">
+                                  <p:stCondLst>
+                                    <p:cond delay="0"/>
+                                  </p:stCondLst>
+                                  <p:childTnLst>
+                                    <p:set>
+                                      <p:cBhvr>
+                                        <p:cTn id="22" dur="1" fill="hold">
+                                          <p:stCondLst>
+                                            <p:cond delay="0"/>
+                                          </p:stCondLst>
+                                        </p:cTn>
+                                        <p:tgtEl>
+                                          <p:spTgt spid="4">
+                                            <p:txEl>
+                                              <p:pRg st="5" end="5"/>
+                                            </p:txEl>
+                                          </p:spTgt>
+                                        </p:tgtEl>
+                                        <p:attrNameLst>
+                                          <p:attrName>style.visibility</p:attrName>
+                                        </p:attrNameLst>
+                                      </p:cBhvr>
+                                      <p:to>
+                                        <p:strVal val="visible"/>
+                                      </p:to>
+                                    </p:set>
+                                  </p:childTnLst>
+                                </p:cTn>
+                              </p:par>
+                            </p:childTnLst>
+                          </p:cTn>
+                        </p:par>
+                      </p:childTnLst>
+                    </p:cTn>
+                  </p:par>
+                </p:childTnLst>
+              </p:cTn>
+              <p:prevCondLst>
+                <p:cond evt="onPrev" delay="0">
+                  <p:tgtEl>
+                    <p:sldTgt/>
+                  </p:tgtEl>
+                </p:cond>
+              </p:prevCondLst>
+              <p:nextCondLst>
+                <p:cond evt="onNext" delay="0">
+                  <p:tgtEl>
+                    <p:sldTgt/>
+                  </p:tgtEl>
+                </p:cond>
+              </p:nextCondLst>
+            </p:seq>
+          </p:childTnLst>
+        </p:cTn>
+      </p:par>
+    </p:tnLst>
+    <p:bldLst>
+      <p:bldP spid="4" grpId="0" uiExpand="1" build="p"/>
+    </p:bldLst>
+  </p:timing>
 </p:sld>
 </file>
 
@@ -19442,16 +19730,14 @@
           <a:bodyPr/>
           <a:lstStyle/>
           <a:p>
-            <a:pPr lvl="0" indent="0" marL="0">
-              <a:buNone/>
-            </a:pPr>
+            <a:pPr lvl="0"/>
             <a:r>
               <a:rPr b="1"/>
               <a:t>R wrangling skills:</a:t>
             </a:r>
           </a:p>
           <a:p>
-            <a:pPr lvl="0"/>
+            <a:pPr lvl="1"/>
             <a:r>
               <a:rPr>
                 <a:latin typeface="Courier"/>
@@ -19464,7 +19750,7 @@
             </a:r>
           </a:p>
           <a:p>
-            <a:pPr lvl="0"/>
+            <a:pPr lvl="1"/>
             <a:r>
               <a:rPr>
                 <a:latin typeface="Courier"/>
@@ -19477,7 +19763,7 @@
             </a:r>
           </a:p>
           <a:p>
-            <a:pPr lvl="0"/>
+            <a:pPr lvl="1"/>
             <a:r>
               <a:rPr>
                 <a:latin typeface="Courier"/>
@@ -19490,7 +19776,7 @@
             </a:r>
           </a:p>
           <a:p>
-            <a:pPr lvl="0"/>
+            <a:pPr lvl="1"/>
             <a:r>
               <a:rPr>
                 <a:latin typeface="Courier"/>
@@ -19503,7 +19789,7 @@
             </a:r>
           </a:p>
           <a:p>
-            <a:pPr lvl="0"/>
+            <a:pPr lvl="1"/>
             <a:r>
               <a:rPr/>
               <a:t>Full pipeline: chain all verbs with </a:t>
@@ -19516,16 +19802,14 @@
             </a:r>
           </a:p>
           <a:p>
-            <a:pPr lvl="0" indent="0" marL="0">
-              <a:buNone/>
-            </a:pPr>
+            <a:pPr lvl="0"/>
             <a:r>
               <a:rPr b="1"/>
               <a:t>Statistics concepts:</a:t>
             </a:r>
           </a:p>
           <a:p>
-            <a:pPr lvl="0"/>
+            <a:pPr lvl="1"/>
             <a:r>
               <a:rPr b="1"/>
               <a:t>Mean</a:t>
@@ -19536,7 +19820,7 @@
             </a:r>
           </a:p>
           <a:p>
-            <a:pPr lvl="0"/>
+            <a:pPr lvl="1"/>
             <a:r>
               <a:rPr b="1"/>
               <a:t>Median</a:t>
@@ -19547,7 +19831,7 @@
             </a:r>
           </a:p>
           <a:p>
-            <a:pPr lvl="0"/>
+            <a:pPr lvl="1"/>
             <a:r>
               <a:rPr b="1"/>
               <a:t>Variance / SD</a:t>
@@ -19558,7 +19842,7 @@
             </a:r>
           </a:p>
           <a:p>
-            <a:pPr lvl="0"/>
+            <a:pPr lvl="1"/>
             <a:r>
               <a:rPr b="1"/>
               <a:t>SE</a:t>
@@ -19569,16 +19853,14 @@
             </a:r>
           </a:p>
           <a:p>
-            <a:pPr lvl="0" indent="0" marL="0">
-              <a:buNone/>
-            </a:pPr>
+            <a:pPr lvl="0"/>
             <a:r>
               <a:rPr b="1"/>
               <a:t>More R skills:</a:t>
             </a:r>
           </a:p>
           <a:p>
-            <a:pPr lvl="0"/>
+            <a:pPr lvl="1"/>
             <a:r>
               <a:rPr>
                 <a:latin typeface="Courier"/>
@@ -19601,7 +19883,7 @@
             </a:r>
           </a:p>
           <a:p>
-            <a:pPr lvl="0"/>
+            <a:pPr lvl="1"/>
             <a:r>
               <a:rPr>
                 <a:latin typeface="Courier"/>
@@ -19618,7 +19900,7 @@
             </a:r>
           </a:p>
           <a:p>
-            <a:pPr lvl="0"/>
+            <a:pPr lvl="1"/>
             <a:r>
               <a:rPr>
                 <a:latin typeface="Courier"/>
@@ -19631,7 +19913,7 @@
             </a:r>
           </a:p>
           <a:p>
-            <a:pPr lvl="0"/>
+            <a:pPr lvl="1"/>
             <a:r>
               <a:rPr>
                 <a:latin typeface="Courier"/>
@@ -20023,9 +20305,7 @@
             </a:r>
           </a:p>
           <a:p>
-            <a:pPr lvl="0" indent="0" marL="1270000">
-              <a:buNone/>
-            </a:pPr>
+            <a:pPr lvl="0"/>
             <a:r>
               <a:rPr sz="2000"/>
               <a:t>Run in the Console one time only: </a:t>
@@ -20038,9 +20318,7 @@
             </a:r>
           </a:p>
           <a:p>
-            <a:pPr lvl="0" indent="0" marL="1270000">
-              <a:buNone/>
-            </a:pPr>
+            <a:pPr lvl="0"/>
             <a:r>
               <a:rPr sz="2000"/>
               <a:t>Then every session: </a:t>
@@ -20313,19 +20591,6 @@
             <a:r>
               <a:rPr/>
               <a:t> = numeric</a:t>
-            </a:r>
-          </a:p>
-          <a:p>
-            <a:pPr lvl="0" indent="0" marL="0">
-              <a:buNone/>
-            </a:pPr>
-            <a:r>
-              <a:rPr/>
-              <a:t>10 sunny + 10 shady = </a:t>
-            </a:r>
-            <a:r>
-              <a:rPr b="1"/>
-              <a:t>balanced design</a:t>
             </a:r>
           </a:p>
         </p:txBody>
@@ -20960,36 +21225,346 @@
                 </a:solidFill>
                 <a:latin typeface="Courier"/>
               </a:rPr>
+              <a:t>) </a:t>
+            </a:r>
+            <a:r>
+              <a:rPr>
+                <a:solidFill>
+                  <a:srgbClr val="5E5E5E"/>
+                </a:solidFill>
+                <a:latin typeface="Courier"/>
+              </a:rPr>
+              <a:t>%&gt;%</a:t>
+            </a:r>
+            <a:r>
+              <a:rPr>
+                <a:solidFill>
+                  <a:srgbClr val="003B4F"/>
+                </a:solidFill>
+                <a:latin typeface="Courier"/>
+              </a:rPr>
+              <a:t> </a:t>
+            </a:r>
+            <a:r>
+              <a:rPr>
+                <a:solidFill>
+                  <a:srgbClr val="4758AB"/>
+                </a:solidFill>
+                <a:latin typeface="Courier"/>
+              </a:rPr>
+              <a:t>head</a:t>
+            </a:r>
+            <a:r>
+              <a:rPr>
+                <a:solidFill>
+                  <a:srgbClr val="003B4F"/>
+                </a:solidFill>
+                <a:latin typeface="Courier"/>
+              </a:rPr>
+              <a:t>()   </a:t>
+            </a:r>
+          </a:p>
+          <a:p>
+            <a:pPr lvl="0" indent="0">
+              <a:buNone/>
+            </a:pPr>
+            <a:r>
+              <a:rPr>
+                <a:latin typeface="Courier"/>
+              </a:rPr>
+              <a:t># A tibble: 6 × 5
+  index side  weight_g width_cm height_cm
+  &lt;dbl&gt; &lt;chr&gt;    &lt;dbl&gt;    &lt;dbl&gt;     &lt;dbl&gt;
+1     1 sunny        4       12        21
+2     2 sunny        3       14        22
+3     3 sunny        5       12        21
+4     4 sunny        3       13        23
+5     5 sunny        4       15        22
+6     6 sunny        3       13        23</a:t>
+            </a:r>
+          </a:p>
+          <a:p>
+            <a:pPr lvl="0" indent="0">
+              <a:buNone/>
+            </a:pPr>
+            <a:r>
+              <a:rPr>
+                <a:solidFill>
+                  <a:srgbClr val="5E5E5E"/>
+                </a:solidFill>
+                <a:latin typeface="Courier"/>
+              </a:rPr>
+              <a:t># Keep only leaves heavier than 5 g</a:t>
+            </a:r>
+            <a:br/>
+            <a:r>
+              <a:rPr>
+                <a:solidFill>
+                  <a:srgbClr val="003B4F"/>
+                </a:solidFill>
+                <a:latin typeface="Courier"/>
+              </a:rPr>
+              <a:t>tree_df </a:t>
+            </a:r>
+            <a:r>
+              <a:rPr>
+                <a:solidFill>
+                  <a:srgbClr val="5E5E5E"/>
+                </a:solidFill>
+                <a:latin typeface="Courier"/>
+              </a:rPr>
+              <a:t>%&gt;%</a:t>
+            </a:r>
+            <a:r>
+              <a:rPr>
+                <a:solidFill>
+                  <a:srgbClr val="003B4F"/>
+                </a:solidFill>
+                <a:latin typeface="Courier"/>
+              </a:rPr>
+              <a:t> </a:t>
+            </a:r>
+            <a:r>
+              <a:rPr>
+                <a:solidFill>
+                  <a:srgbClr val="4758AB"/>
+                </a:solidFill>
+                <a:latin typeface="Courier"/>
+              </a:rPr>
+              <a:t>filter</a:t>
+            </a:r>
+            <a:r>
+              <a:rPr>
+                <a:solidFill>
+                  <a:srgbClr val="003B4F"/>
+                </a:solidFill>
+                <a:latin typeface="Courier"/>
+              </a:rPr>
+              <a:t>(weight_g </a:t>
+            </a:r>
+            <a:r>
+              <a:rPr>
+                <a:solidFill>
+                  <a:srgbClr val="5E5E5E"/>
+                </a:solidFill>
+                <a:latin typeface="Courier"/>
+              </a:rPr>
+              <a:t>&gt;</a:t>
+            </a:r>
+            <a:r>
+              <a:rPr>
+                <a:solidFill>
+                  <a:srgbClr val="003B4F"/>
+                </a:solidFill>
+                <a:latin typeface="Courier"/>
+              </a:rPr>
+              <a:t> </a:t>
+            </a:r>
+            <a:r>
+              <a:rPr>
+                <a:solidFill>
+                  <a:srgbClr val="AD0000"/>
+                </a:solidFill>
+                <a:latin typeface="Courier"/>
+              </a:rPr>
+              <a:t>5</a:t>
+            </a:r>
+            <a:r>
+              <a:rPr>
+                <a:solidFill>
+                  <a:srgbClr val="003B4F"/>
+                </a:solidFill>
+                <a:latin typeface="Courier"/>
+              </a:rPr>
+              <a:t>) </a:t>
+            </a:r>
+            <a:r>
+              <a:rPr>
+                <a:solidFill>
+                  <a:srgbClr val="5E5E5E"/>
+                </a:solidFill>
+                <a:latin typeface="Courier"/>
+              </a:rPr>
+              <a:t>%&gt;%</a:t>
+            </a:r>
+            <a:r>
+              <a:rPr>
+                <a:solidFill>
+                  <a:srgbClr val="003B4F"/>
+                </a:solidFill>
+                <a:latin typeface="Courier"/>
+              </a:rPr>
+              <a:t> </a:t>
+            </a:r>
+            <a:r>
+              <a:rPr>
+                <a:solidFill>
+                  <a:srgbClr val="4758AB"/>
+                </a:solidFill>
+                <a:latin typeface="Courier"/>
+              </a:rPr>
+              <a:t>head</a:t>
+            </a:r>
+            <a:r>
+              <a:rPr>
+                <a:solidFill>
+                  <a:srgbClr val="003B4F"/>
+                </a:solidFill>
+                <a:latin typeface="Courier"/>
+              </a:rPr>
+              <a:t>()</a:t>
+            </a:r>
+          </a:p>
+          <a:p>
+            <a:pPr lvl="0" indent="0">
+              <a:buNone/>
+            </a:pPr>
+            <a:r>
+              <a:rPr>
+                <a:latin typeface="Courier"/>
+              </a:rPr>
+              <a:t># A tibble: 6 × 5
+  index side  weight_g width_cm height_cm
+  &lt;dbl&gt; &lt;chr&gt;    &lt;dbl&gt;    &lt;dbl&gt;     &lt;dbl&gt;
+1    11 shady        7        9        28
+2    12 shady        8       18        29
+3    13 shady        6       17        27
+4    14 shady        9       18        28
+5    15 shady        8       19        27
+6    16 shady        7       19        28</a:t>
+            </a:r>
+          </a:p>
+          <a:p>
+            <a:pPr lvl="0" indent="0">
+              <a:buNone/>
+            </a:pPr>
+            <a:r>
+              <a:rPr>
+                <a:solidFill>
+                  <a:srgbClr val="5E5E5E"/>
+                </a:solidFill>
+                <a:latin typeface="Courier"/>
+              </a:rPr>
+              <a:t># Combine two conditions with &amp; (AND)</a:t>
+            </a:r>
+            <a:br/>
+            <a:r>
+              <a:rPr>
+                <a:solidFill>
+                  <a:srgbClr val="003B4F"/>
+                </a:solidFill>
+                <a:latin typeface="Courier"/>
+              </a:rPr>
+              <a:t>tree_df </a:t>
+            </a:r>
+            <a:r>
+              <a:rPr>
+                <a:solidFill>
+                  <a:srgbClr val="5E5E5E"/>
+                </a:solidFill>
+                <a:latin typeface="Courier"/>
+              </a:rPr>
+              <a:t>%&gt;%</a:t>
+            </a:r>
+            <a:r>
+              <a:rPr>
+                <a:solidFill>
+                  <a:srgbClr val="003B4F"/>
+                </a:solidFill>
+                <a:latin typeface="Courier"/>
+              </a:rPr>
+              <a:t> </a:t>
+            </a:r>
+            <a:r>
+              <a:rPr>
+                <a:solidFill>
+                  <a:srgbClr val="4758AB"/>
+                </a:solidFill>
+                <a:latin typeface="Courier"/>
+              </a:rPr>
+              <a:t>filter</a:t>
+            </a:r>
+            <a:r>
+              <a:rPr>
+                <a:solidFill>
+                  <a:srgbClr val="003B4F"/>
+                </a:solidFill>
+                <a:latin typeface="Courier"/>
+              </a:rPr>
+              <a:t>(side </a:t>
+            </a:r>
+            <a:r>
+              <a:rPr>
+                <a:solidFill>
+                  <a:srgbClr val="5E5E5E"/>
+                </a:solidFill>
+                <a:latin typeface="Courier"/>
+              </a:rPr>
+              <a:t>==</a:t>
+            </a:r>
+            <a:r>
+              <a:rPr>
+                <a:solidFill>
+                  <a:srgbClr val="003B4F"/>
+                </a:solidFill>
+                <a:latin typeface="Courier"/>
+              </a:rPr>
+              <a:t> </a:t>
+            </a:r>
+            <a:r>
+              <a:rPr>
+                <a:solidFill>
+                  <a:srgbClr val="20794D"/>
+                </a:solidFill>
+                <a:latin typeface="Courier"/>
+              </a:rPr>
+              <a:t>"shady"</a:t>
+            </a:r>
+            <a:r>
+              <a:rPr>
+                <a:solidFill>
+                  <a:srgbClr val="003B4F"/>
+                </a:solidFill>
+                <a:latin typeface="Courier"/>
+              </a:rPr>
+              <a:t>, weight_g </a:t>
+            </a:r>
+            <a:r>
+              <a:rPr>
+                <a:solidFill>
+                  <a:srgbClr val="5E5E5E"/>
+                </a:solidFill>
+                <a:latin typeface="Courier"/>
+              </a:rPr>
+              <a:t>&gt;</a:t>
+            </a:r>
+            <a:r>
+              <a:rPr>
+                <a:solidFill>
+                  <a:srgbClr val="003B4F"/>
+                </a:solidFill>
+                <a:latin typeface="Courier"/>
+              </a:rPr>
+              <a:t> </a:t>
+            </a:r>
+            <a:r>
+              <a:rPr>
+                <a:solidFill>
+                  <a:srgbClr val="AD0000"/>
+                </a:solidFill>
+                <a:latin typeface="Courier"/>
+              </a:rPr>
+              <a:t>7</a:t>
+            </a:r>
+            <a:r>
+              <a:rPr>
+                <a:solidFill>
+                  <a:srgbClr val="003B4F"/>
+                </a:solidFill>
+                <a:latin typeface="Courier"/>
+              </a:rPr>
               <a:t>)</a:t>
             </a:r>
-          </a:p>
-          <a:p>
-            <a:pPr lvl="0" indent="0">
-              <a:buNone/>
-            </a:pPr>
-            <a:r>
-              <a:rPr>
-                <a:latin typeface="Courier"/>
-              </a:rPr>
-              <a:t># A tibble: 10 × 5
-   index side  weight_g width_cm height_cm
-   &lt;dbl&gt; &lt;chr&gt;    &lt;dbl&gt;    &lt;dbl&gt;     &lt;dbl&gt;
- 1     1 sunny        4       12        21
- 2     2 sunny        3       14        22
- 3     3 sunny        5       12        21
- 4     4 sunny        3       13        23
- 5     5 sunny        4       15        22
- 6     6 sunny        3       13        23
- 7     7 sunny        5       16        21
- 8     8 sunny        4       13        24
- 9     9 sunny        3       14        23
-10    10 sunny        4       15        23</a:t>
-            </a:r>
-          </a:p>
-          <a:p>
-            <a:pPr lvl="0" indent="0">
-              <a:buNone/>
-            </a:pPr>
             <a:r>
               <a:rPr>
                 <a:solidFill>
@@ -20997,25 +21572,6 @@
                 </a:solidFill>
                 <a:latin typeface="Courier"/>
               </a:rPr>
-              <a:t># Keep only leaves heavier than 5 g</a:t>
-            </a:r>
-            <a:br/>
-            <a:r>
-              <a:rPr>
-                <a:solidFill>
-                  <a:srgbClr val="003B4F"/>
-                </a:solidFill>
-                <a:latin typeface="Courier"/>
-              </a:rPr>
-              <a:t>tree_df </a:t>
-            </a:r>
-            <a:r>
-              <a:rPr>
-                <a:solidFill>
-                  <a:srgbClr val="5E5E5E"/>
-                </a:solidFill>
-                <a:latin typeface="Courier"/>
-              </a:rPr>
               <a:t>%&gt;%</a:t>
             </a:r>
             <a:r>
@@ -21034,207 +21590,16 @@
                 </a:solidFill>
                 <a:latin typeface="Courier"/>
               </a:rPr>
-              <a:t>filter</a:t>
-            </a:r>
-            <a:r>
-              <a:rPr>
-                <a:solidFill>
-                  <a:srgbClr val="003B4F"/>
-                </a:solidFill>
-                <a:latin typeface="Courier"/>
-              </a:rPr>
-              <a:t>(weight_g </a:t>
-            </a:r>
-            <a:r>
-              <a:rPr>
-                <a:solidFill>
-                  <a:srgbClr val="5E5E5E"/>
-                </a:solidFill>
-                <a:latin typeface="Courier"/>
-              </a:rPr>
-              <a:t>&gt;</a:t>
-            </a:r>
-            <a:r>
-              <a:rPr>
-                <a:solidFill>
-                  <a:srgbClr val="003B4F"/>
-                </a:solidFill>
-                <a:latin typeface="Courier"/>
-              </a:rPr>
-              <a:t> </a:t>
-            </a:r>
-            <a:r>
-              <a:rPr>
-                <a:solidFill>
-                  <a:srgbClr val="AD0000"/>
-                </a:solidFill>
-                <a:latin typeface="Courier"/>
-              </a:rPr>
-              <a:t>5</a:t>
-            </a:r>
-            <a:r>
-              <a:rPr>
-                <a:solidFill>
-                  <a:srgbClr val="003B4F"/>
-                </a:solidFill>
-                <a:latin typeface="Courier"/>
-              </a:rPr>
-              <a:t>)</a:t>
-            </a:r>
-          </a:p>
-          <a:p>
-            <a:pPr lvl="0" indent="0">
-              <a:buNone/>
-            </a:pPr>
-            <a:r>
-              <a:rPr>
-                <a:latin typeface="Courier"/>
-              </a:rPr>
-              <a:t># A tibble: 10 × 5
-   index side  weight_g width_cm height_cm
-   &lt;dbl&gt; &lt;chr&gt;    &lt;dbl&gt;    &lt;dbl&gt;     &lt;dbl&gt;
- 1    11 shady        7        9        28
- 2    12 shady        8       18        29
- 3    13 shady        6       17        27
- 4    14 shady        9       18        28
- 5    15 shady        8       19        27
- 6    16 shady        7       19        28
- 7    17 shady        8       18        29
- 8    18 shady        9       17        27
- 9    19 shady        9       19        27
-10    20 shady        7       19        29</a:t>
-            </a:r>
-          </a:p>
-          <a:p>
-            <a:pPr lvl="0" indent="0">
-              <a:buNone/>
-            </a:pPr>
-            <a:r>
-              <a:rPr>
-                <a:solidFill>
-                  <a:srgbClr val="5E5E5E"/>
-                </a:solidFill>
-                <a:latin typeface="Courier"/>
-              </a:rPr>
-              <a:t># Combine two conditions with &amp; (AND)</a:t>
-            </a:r>
-            <a:br/>
-            <a:r>
-              <a:rPr>
-                <a:solidFill>
-                  <a:srgbClr val="003B4F"/>
-                </a:solidFill>
-                <a:latin typeface="Courier"/>
-              </a:rPr>
-              <a:t>tree_df </a:t>
-            </a:r>
-            <a:r>
-              <a:rPr>
-                <a:solidFill>
-                  <a:srgbClr val="5E5E5E"/>
-                </a:solidFill>
-                <a:latin typeface="Courier"/>
-              </a:rPr>
-              <a:t>%&gt;%</a:t>
-            </a:r>
-            <a:r>
-              <a:rPr>
-                <a:solidFill>
-                  <a:srgbClr val="003B4F"/>
-                </a:solidFill>
-                <a:latin typeface="Courier"/>
-              </a:rPr>
-              <a:t> </a:t>
-            </a:r>
-            <a:r>
-              <a:rPr>
-                <a:solidFill>
-                  <a:srgbClr val="4758AB"/>
-                </a:solidFill>
-                <a:latin typeface="Courier"/>
-              </a:rPr>
-              <a:t>filter</a:t>
-            </a:r>
-            <a:r>
-              <a:rPr>
-                <a:solidFill>
-                  <a:srgbClr val="003B4F"/>
-                </a:solidFill>
-                <a:latin typeface="Courier"/>
-              </a:rPr>
-              <a:t>(side </a:t>
-            </a:r>
-            <a:r>
-              <a:rPr>
-                <a:solidFill>
-                  <a:srgbClr val="5E5E5E"/>
-                </a:solidFill>
-                <a:latin typeface="Courier"/>
-              </a:rPr>
-              <a:t>==</a:t>
-            </a:r>
-            <a:r>
-              <a:rPr>
-                <a:solidFill>
-                  <a:srgbClr val="003B4F"/>
-                </a:solidFill>
-                <a:latin typeface="Courier"/>
-              </a:rPr>
-              <a:t> </a:t>
-            </a:r>
-            <a:r>
-              <a:rPr>
-                <a:solidFill>
-                  <a:srgbClr val="20794D"/>
-                </a:solidFill>
-                <a:latin typeface="Courier"/>
-              </a:rPr>
-              <a:t>"shady"</a:t>
-            </a:r>
-            <a:r>
-              <a:rPr>
-                <a:solidFill>
-                  <a:srgbClr val="003B4F"/>
-                </a:solidFill>
-                <a:latin typeface="Courier"/>
-              </a:rPr>
-              <a:t>, weight_g </a:t>
-            </a:r>
-            <a:r>
-              <a:rPr>
-                <a:solidFill>
-                  <a:srgbClr val="5E5E5E"/>
-                </a:solidFill>
-                <a:latin typeface="Courier"/>
-              </a:rPr>
-              <a:t>&gt;</a:t>
-            </a:r>
-            <a:r>
-              <a:rPr>
-                <a:solidFill>
-                  <a:srgbClr val="003B4F"/>
-                </a:solidFill>
-                <a:latin typeface="Courier"/>
-              </a:rPr>
-              <a:t> </a:t>
-            </a:r>
-            <a:r>
-              <a:rPr>
-                <a:solidFill>
-                  <a:srgbClr val="AD0000"/>
-                </a:solidFill>
-                <a:latin typeface="Courier"/>
-              </a:rPr>
-              <a:t>7</a:t>
-            </a:r>
-            <a:r>
-              <a:rPr>
-                <a:solidFill>
-                  <a:srgbClr val="003B4F"/>
-                </a:solidFill>
-                <a:latin typeface="Courier"/>
-              </a:rPr>
-              <a:t>)</a:t>
+              <a:t>head</a:t>
+            </a:r>
+            <a:r>
+              <a:rPr>
+                <a:solidFill>
+                  <a:srgbClr val="003B4F"/>
+                </a:solidFill>
+                <a:latin typeface="Courier"/>
+              </a:rPr>
+              <a:t>()</a:t>
             </a:r>
           </a:p>
           <a:p>
@@ -21497,6 +21862,74 @@
                   </a:txBody>
                 </a:tc>
               </a:tr>
+              <a:tr h="0">
+                <a:tc>
+                  <a:txBody>
+                    <a:bodyPr/>
+                    <a:lstStyle/>
+                    <a:p>
+                      <a:pPr lvl="0" indent="0" marL="0">
+                        <a:buNone/>
+                      </a:pPr>
+                      <a:r>
+                        <a:rPr/>
+                        <a:t>is.na</a:t>
+                      </a:r>
+                    </a:p>
+                  </a:txBody>
+                </a:tc>
+                <a:tc>
+                  <a:txBody>
+                    <a:bodyPr/>
+                    <a:lstStyle/>
+                    <a:p>
+                      <a:pPr lvl="0" indent="0" marL="0">
+                        <a:buNone/>
+                      </a:pPr>
+                      <a:r>
+                        <a:rPr/>
+                        <a:t>return all NA rows</a:t>
+                      </a:r>
+                    </a:p>
+                  </a:txBody>
+                </a:tc>
+              </a:tr>
+              <a:tr h="0">
+                <a:tc>
+                  <a:txBody>
+                    <a:bodyPr/>
+                    <a:lstStyle/>
+                    <a:p>
+                      <a:pPr lvl="0" indent="0" marL="0">
+                        <a:buNone/>
+                      </a:pPr>
+                      <a:r>
+                        <a:rPr/>
+                        <a:t>!is.na</a:t>
+                      </a:r>
+                    </a:p>
+                  </a:txBody>
+                </a:tc>
+                <a:tc>
+                  <a:txBody>
+                    <a:bodyPr/>
+                    <a:lstStyle/>
+                    <a:p>
+                      <a:pPr lvl="0" indent="0" marL="0">
+                        <a:buNone/>
+                      </a:pPr>
+                      <a:r>
+                        <a:rPr/>
+                        <a:t>return all rows that are </a:t>
+                      </a:r>
+                      <a:r>
+                        <a:rPr b="1"/>
+                        <a:t>NOT NA</a:t>
+                      </a:r>
+                    </a:p>
+                  </a:txBody>
+                </a:tc>
+              </a:tr>
             </a:tbl>
           </a:graphicData>
         </a:graphic>
@@ -21534,9 +21967,7 @@
             </a:r>
           </a:p>
           <a:p>
-            <a:pPr lvl="0" indent="0" marL="1270000">
-              <a:buNone/>
-            </a:pPr>
+            <a:pPr lvl="0"/>
             <a:r>
               <a:rPr sz="2000">
                 <a:latin typeface="Courier"/>
@@ -21545,8 +21976,11 @@
             </a:r>
             <a:r>
               <a:rPr sz="2000"/>
-              <a:t> assigns a value. </a:t>
-            </a:r>
+              <a:t> assigns a value.</a:t>
+            </a:r>
+          </a:p>
+          <a:p>
+            <a:pPr lvl="0"/>
             <a:r>
               <a:rPr sz="2000">
                 <a:latin typeface="Courier"/>
@@ -21555,8 +21989,11 @@
             </a:r>
             <a:r>
               <a:rPr sz="2000"/>
-              <a:t> tests equality. </a:t>
-            </a:r>
+              <a:t> tests equality.</a:t>
+            </a:r>
+          </a:p>
+          <a:p>
+            <a:pPr lvl="0"/>
             <a:r>
               <a:rPr sz="2000">
                 <a:latin typeface="Courier"/>
@@ -21565,8 +22002,11 @@
             </a:r>
             <a:r>
               <a:rPr sz="2000"/>
-              <a:t> → error. </a:t>
-            </a:r>
+              <a:t> → error.</a:t>
+            </a:r>
+          </a:p>
+          <a:p>
+            <a:pPr lvl="0"/>
             <a:r>
               <a:rPr sz="2000">
                 <a:latin typeface="Courier"/>
@@ -21725,6 +22165,42 @@
               </a:rPr>
               <a:t>(side, weight_g)</a:t>
             </a:r>
+            <a:r>
+              <a:rPr>
+                <a:solidFill>
+                  <a:srgbClr val="5E5E5E"/>
+                </a:solidFill>
+                <a:latin typeface="Courier"/>
+              </a:rPr>
+              <a:t>%&gt;%</a:t>
+            </a:r>
+            <a:r>
+              <a:rPr>
+                <a:solidFill>
+                  <a:srgbClr val="003B4F"/>
+                </a:solidFill>
+                <a:latin typeface="Courier"/>
+              </a:rPr>
+              <a:t> </a:t>
+            </a:r>
+            <a:r>
+              <a:rPr>
+                <a:solidFill>
+                  <a:srgbClr val="4758AB"/>
+                </a:solidFill>
+                <a:latin typeface="Courier"/>
+              </a:rPr>
+              <a:t>head</a:t>
+            </a:r>
+            <a:r>
+              <a:rPr>
+                <a:solidFill>
+                  <a:srgbClr val="003B4F"/>
+                </a:solidFill>
+                <a:latin typeface="Courier"/>
+              </a:rPr>
+              <a:t>()</a:t>
+            </a:r>
           </a:p>
           <a:p>
             <a:pPr lvl="0" indent="0">
@@ -21734,29 +22210,15 @@
               <a:rPr>
                 <a:latin typeface="Courier"/>
               </a:rPr>
-              <a:t># A tibble: 20 × 2
-   side  weight_g
-   &lt;chr&gt;    &lt;dbl&gt;
- 1 sunny        4
- 2 sunny        3
- 3 sunny        5
- 4 sunny        3
- 5 sunny        4
- 6 sunny        3
- 7 sunny        5
- 8 sunny        4
- 9 sunny        3
-10 sunny        4
-11 shady        7
-12 shady        8
-13 shady        6
-14 shady        9
-15 shady        8
-16 shady        7
-17 shady        8
-18 shady        9
-19 shady        9
-20 shady        7</a:t>
+              <a:t># A tibble: 6 × 2
+  side  weight_g
+  &lt;chr&gt;    &lt;dbl&gt;
+1 sunny        4
+2 sunny        3
+3 sunny        5
+4 sunny        3
+5 sunny        4
+6 sunny        3</a:t>
             </a:r>
           </a:p>
           <a:p>
@@ -21836,6 +22298,42 @@
               </a:rPr>
               <a:t>index)</a:t>
             </a:r>
+            <a:r>
+              <a:rPr>
+                <a:solidFill>
+                  <a:srgbClr val="5E5E5E"/>
+                </a:solidFill>
+                <a:latin typeface="Courier"/>
+              </a:rPr>
+              <a:t>%&gt;%</a:t>
+            </a:r>
+            <a:r>
+              <a:rPr>
+                <a:solidFill>
+                  <a:srgbClr val="003B4F"/>
+                </a:solidFill>
+                <a:latin typeface="Courier"/>
+              </a:rPr>
+              <a:t> </a:t>
+            </a:r>
+            <a:r>
+              <a:rPr>
+                <a:solidFill>
+                  <a:srgbClr val="4758AB"/>
+                </a:solidFill>
+                <a:latin typeface="Courier"/>
+              </a:rPr>
+              <a:t>head</a:t>
+            </a:r>
+            <a:r>
+              <a:rPr>
+                <a:solidFill>
+                  <a:srgbClr val="003B4F"/>
+                </a:solidFill>
+                <a:latin typeface="Courier"/>
+              </a:rPr>
+              <a:t>()</a:t>
+            </a:r>
           </a:p>
           <a:p>
             <a:pPr lvl="0" indent="0">
@@ -21845,29 +22343,15 @@
               <a:rPr>
                 <a:latin typeface="Courier"/>
               </a:rPr>
-              <a:t># A tibble: 20 × 4
-   side  weight_g width_cm height_cm
-   &lt;chr&gt;    &lt;dbl&gt;    &lt;dbl&gt;     &lt;dbl&gt;
- 1 sunny        4       12        21
- 2 sunny        3       14        22
- 3 sunny        5       12        21
- 4 sunny        3       13        23
- 5 sunny        4       15        22
- 6 sunny        3       13        23
- 7 sunny        5       16        21
- 8 sunny        4       13        24
- 9 sunny        3       14        23
-10 sunny        4       15        23
-11 shady        7        9        28
-12 shady        8       18        29
-13 shady        6       17        27
-14 shady        9       18        28
-15 shady        8       19        27
-16 shady        7       19        28
-17 shady        8       18        29
-18 shady        9       17        27
-19 shady        9       19        27
-20 shady        7       19        29</a:t>
+              <a:t># A tibble: 6 × 4
+  side  weight_g width_cm height_cm
+  &lt;chr&gt;    &lt;dbl&gt;    &lt;dbl&gt;     &lt;dbl&gt;
+1 sunny        4       12        21
+2 sunny        3       14        22
+3 sunny        5       12        21
+4 sunny        3       13        23
+5 sunny        4       15        22
+6 sunny        3       13        23</a:t>
             </a:r>
           </a:p>
           <a:p>
@@ -21963,7 +22447,43 @@
                 </a:solidFill>
                 <a:latin typeface="Courier"/>
               </a:rPr>
-              <a:t>))</a:t>
+              <a:t>)) </a:t>
+            </a:r>
+            <a:r>
+              <a:rPr>
+                <a:solidFill>
+                  <a:srgbClr val="5E5E5E"/>
+                </a:solidFill>
+                <a:latin typeface="Courier"/>
+              </a:rPr>
+              <a:t>%&gt;%</a:t>
+            </a:r>
+            <a:r>
+              <a:rPr>
+                <a:solidFill>
+                  <a:srgbClr val="003B4F"/>
+                </a:solidFill>
+                <a:latin typeface="Courier"/>
+              </a:rPr>
+              <a:t> </a:t>
+            </a:r>
+            <a:r>
+              <a:rPr>
+                <a:solidFill>
+                  <a:srgbClr val="4758AB"/>
+                </a:solidFill>
+                <a:latin typeface="Courier"/>
+              </a:rPr>
+              <a:t>head</a:t>
+            </a:r>
+            <a:r>
+              <a:rPr>
+                <a:solidFill>
+                  <a:srgbClr val="003B4F"/>
+                </a:solidFill>
+                <a:latin typeface="Courier"/>
+              </a:rPr>
+              <a:t>()</a:t>
             </a:r>
           </a:p>
           <a:p>
@@ -21974,29 +22494,15 @@
               <a:rPr>
                 <a:latin typeface="Courier"/>
               </a:rPr>
-              <a:t># A tibble: 20 × 1
-   weight_g
-      &lt;dbl&gt;
- 1        4
- 2        3
- 3        5
- 4        3
- 5        4
- 6        3
- 7        5
- 8        4
- 9        3
-10        4
-11        7
-12        8
-13        6
-14        9
-15        8
-16        7
-17        8
-18        9
-19        9
-20        7</a:t>
+              <a:t># A tibble: 6 × 1
+  weight_g
+     &lt;dbl&gt;
+1        4
+2        3
+3        5
+4        3
+5        4
+6        3</a:t>
             </a:r>
           </a:p>
         </p:txBody>
@@ -22016,9 +22522,7 @@
           <a:bodyPr/>
           <a:lstStyle/>
           <a:p>
-            <a:pPr lvl="0" indent="0" marL="0">
-              <a:buNone/>
-            </a:pPr>
+            <a:pPr lvl="0"/>
             <a:r>
               <a:rPr b="1"/>
               <a:t>Why </a:t>
@@ -22035,21 +22539,21 @@
             </a:r>
           </a:p>
           <a:p>
-            <a:pPr lvl="0"/>
+            <a:pPr lvl="1"/>
             <a:r>
               <a:rPr/>
               <a:t>Real datasets often have 50–100+ columns</a:t>
             </a:r>
           </a:p>
           <a:p>
-            <a:pPr lvl="0"/>
+            <a:pPr lvl="1"/>
             <a:r>
               <a:rPr/>
               <a:t>You rarely need all of them</a:t>
             </a:r>
           </a:p>
           <a:p>
-            <a:pPr lvl="0"/>
+            <a:pPr lvl="1"/>
             <a:r>
               <a:rPr>
                 <a:latin typeface="Courier"/>
@@ -22062,16 +22566,14 @@
             </a:r>
           </a:p>
           <a:p>
-            <a:pPr lvl="0" indent="0" marL="0">
-              <a:buNone/>
-            </a:pPr>
+            <a:pPr lvl="0"/>
             <a:r>
               <a:rPr b="1"/>
               <a:t>Useful helpers:</a:t>
             </a:r>
           </a:p>
           <a:p>
-            <a:pPr lvl="0"/>
+            <a:pPr lvl="1"/>
             <a:r>
               <a:rPr>
                 <a:latin typeface="Courier"/>
@@ -22084,7 +22586,7 @@
             </a:r>
           </a:p>
           <a:p>
-            <a:pPr lvl="0"/>
+            <a:pPr lvl="1"/>
             <a:r>
               <a:rPr>
                 <a:latin typeface="Courier"/>
@@ -22097,7 +22599,7 @@
             </a:r>
           </a:p>
           <a:p>
-            <a:pPr lvl="0"/>
+            <a:pPr lvl="1"/>
             <a:r>
               <a:rPr>
                 <a:latin typeface="Courier"/>
@@ -22324,7 +22826,43 @@
                 </a:solidFill>
                 <a:latin typeface="Courier"/>
               </a:rPr>
-              <a:t>)</a:t>
+              <a:t>) </a:t>
+            </a:r>
+            <a:r>
+              <a:rPr>
+                <a:solidFill>
+                  <a:srgbClr val="5E5E5E"/>
+                </a:solidFill>
+                <a:latin typeface="Courier"/>
+              </a:rPr>
+              <a:t>%&gt;%</a:t>
+            </a:r>
+            <a:r>
+              <a:rPr>
+                <a:solidFill>
+                  <a:srgbClr val="003B4F"/>
+                </a:solidFill>
+                <a:latin typeface="Courier"/>
+              </a:rPr>
+              <a:t> </a:t>
+            </a:r>
+            <a:r>
+              <a:rPr>
+                <a:solidFill>
+                  <a:srgbClr val="4758AB"/>
+                </a:solidFill>
+                <a:latin typeface="Courier"/>
+              </a:rPr>
+              <a:t>head</a:t>
+            </a:r>
+            <a:r>
+              <a:rPr>
+                <a:solidFill>
+                  <a:srgbClr val="003B4F"/>
+                </a:solidFill>
+                <a:latin typeface="Courier"/>
+              </a:rPr>
+              <a:t>()</a:t>
             </a:r>
           </a:p>
           <a:p>
@@ -22335,29 +22873,15 @@
               <a:rPr>
                 <a:latin typeface="Courier"/>
               </a:rPr>
-              <a:t># A tibble: 20 × 6
-   index side  weight_g width_cm height_cm weight_mg
-   &lt;dbl&gt; &lt;chr&gt;    &lt;dbl&gt;    &lt;dbl&gt;     &lt;dbl&gt;     &lt;dbl&gt;
- 1     1 sunny        4       12        21      4000
- 2     2 sunny        3       14        22      3000
- 3     3 sunny        5       12        21      5000
- 4     4 sunny        3       13        23      3000
- 5     5 sunny        4       15        22      4000
- 6     6 sunny        3       13        23      3000
- 7     7 sunny        5       16        21      5000
- 8     8 sunny        4       13        24      4000
- 9     9 sunny        3       14        23      3000
-10    10 sunny        4       15        23      4000
-11    11 shady        7        9        28      7000
-12    12 shady        8       18        29      8000
-13    13 shady        6       17        27      6000
-14    14 shady        9       18        28      9000
-15    15 shady        8       19        27      8000
-16    16 shady        7       19        28      7000
-17    17 shady        8       18        29      8000
-18    18 shady        9       17        27      9000
-19    19 shady        9       19        27      9000
-20    20 shady        7       19        29      7000</a:t>
+              <a:t># A tibble: 6 × 6
+  index side  weight_g width_cm height_cm weight_mg
+  &lt;dbl&gt; &lt;chr&gt;    &lt;dbl&gt;    &lt;dbl&gt;     &lt;dbl&gt;     &lt;dbl&gt;
+1     1 sunny        4       12        21      4000
+2     2 sunny        3       14        22      3000
+3     3 sunny        5       12        21      5000
+4     4 sunny        3       13        23      3000
+5     5 sunny        4       15        22      4000
+6     6 sunny        3       13        23      3000</a:t>
             </a:r>
           </a:p>
           <a:p>
@@ -22526,7 +23050,43 @@
                 </a:solidFill>
                 <a:latin typeface="Courier"/>
               </a:rPr>
-              <a:t>))</a:t>
+              <a:t>)) </a:t>
+            </a:r>
+            <a:r>
+              <a:rPr>
+                <a:solidFill>
+                  <a:srgbClr val="5E5E5E"/>
+                </a:solidFill>
+                <a:latin typeface="Courier"/>
+              </a:rPr>
+              <a:t>%&gt;%</a:t>
+            </a:r>
+            <a:r>
+              <a:rPr>
+                <a:solidFill>
+                  <a:srgbClr val="003B4F"/>
+                </a:solidFill>
+                <a:latin typeface="Courier"/>
+              </a:rPr>
+              <a:t> </a:t>
+            </a:r>
+            <a:r>
+              <a:rPr>
+                <a:solidFill>
+                  <a:srgbClr val="4758AB"/>
+                </a:solidFill>
+                <a:latin typeface="Courier"/>
+              </a:rPr>
+              <a:t>head</a:t>
+            </a:r>
+            <a:r>
+              <a:rPr>
+                <a:solidFill>
+                  <a:srgbClr val="003B4F"/>
+                </a:solidFill>
+                <a:latin typeface="Courier"/>
+              </a:rPr>
+              <a:t>()</a:t>
             </a:r>
           </a:p>
           <a:p>
@@ -22537,29 +23097,15 @@
               <a:rPr>
                 <a:latin typeface="Courier"/>
               </a:rPr>
-              <a:t># A tibble: 20 × 6
-   index side  weight_g width_cm height_cm size_class
-   &lt;dbl&gt; &lt;chr&gt;    &lt;dbl&gt;    &lt;dbl&gt;     &lt;dbl&gt; &lt;chr&gt;     
- 1     1 sunny        4       12        21 small     
- 2     2 sunny        3       14        22 small     
- 3     3 sunny        5       12        21 small     
- 4     4 sunny        3       13        23 small     
- 5     5 sunny        4       15        22 small     
- 6     6 sunny        3       13        23 small     
- 7     7 sunny        5       16        21 small     
- 8     8 sunny        4       13        24 small     
- 9     9 sunny        3       14        23 small     
-10    10 sunny        4       15        23 small     
-11    11 shady        7        9        28 large     
-12    12 shady        8       18        29 large     
-13    13 shady        6       17        27 large     
-14    14 shady        9       18        28 large     
-15    15 shady        8       19        27 large     
-16    16 shady        7       19        28 large     
-17    17 shady        8       18        29 large     
-18    18 shady        9       17        27 large     
-19    19 shady        9       19        27 large     
-20    20 shady        7       19        29 large     </a:t>
+              <a:t># A tibble: 6 × 6
+  index side  weight_g width_cm height_cm size_class
+  &lt;dbl&gt; &lt;chr&gt;    &lt;dbl&gt;    &lt;dbl&gt;     &lt;dbl&gt; &lt;chr&gt;     
+1     1 sunny        4       12        21 small     
+2     2 sunny        3       14        22 small     
+3     3 sunny        5       12        21 small     
+4     4 sunny        3       13        23 small     
+5     5 sunny        4       15        22 small     
+6     6 sunny        3       13        23 small     </a:t>
             </a:r>
           </a:p>
           <a:p>
@@ -22749,7 +23295,43 @@
                 </a:solidFill>
                 <a:latin typeface="Courier"/>
               </a:rPr>
-              <a:t>  )</a:t>
+              <a:t>  ) </a:t>
+            </a:r>
+            <a:r>
+              <a:rPr>
+                <a:solidFill>
+                  <a:srgbClr val="5E5E5E"/>
+                </a:solidFill>
+                <a:latin typeface="Courier"/>
+              </a:rPr>
+              <a:t>%&gt;%</a:t>
+            </a:r>
+            <a:r>
+              <a:rPr>
+                <a:solidFill>
+                  <a:srgbClr val="003B4F"/>
+                </a:solidFill>
+                <a:latin typeface="Courier"/>
+              </a:rPr>
+              <a:t> </a:t>
+            </a:r>
+            <a:r>
+              <a:rPr>
+                <a:solidFill>
+                  <a:srgbClr val="4758AB"/>
+                </a:solidFill>
+                <a:latin typeface="Courier"/>
+              </a:rPr>
+              <a:t>head</a:t>
+            </a:r>
+            <a:r>
+              <a:rPr>
+                <a:solidFill>
+                  <a:srgbClr val="003B4F"/>
+                </a:solidFill>
+                <a:latin typeface="Courier"/>
+              </a:rPr>
+              <a:t>()</a:t>
             </a:r>
           </a:p>
           <a:p>
@@ -22760,29 +23342,15 @@
               <a:rPr>
                 <a:latin typeface="Courier"/>
               </a:rPr>
-              <a:t># A tibble: 20 × 7
-   index side  weight_g width_cm height_cm weight_mg area_approx
-   &lt;dbl&gt; &lt;chr&gt;    &lt;dbl&gt;    &lt;dbl&gt;     &lt;dbl&gt;     &lt;dbl&gt;       &lt;dbl&gt;
- 1     1 sunny        4       12        21      4000         252
- 2     2 sunny        3       14        22      3000         308
- 3     3 sunny        5       12        21      5000         252
- 4     4 sunny        3       13        23      3000         299
- 5     5 sunny        4       15        22      4000         330
- 6     6 sunny        3       13        23      3000         299
- 7     7 sunny        5       16        21      5000         336
- 8     8 sunny        4       13        24      4000         312
- 9     9 sunny        3       14        23      3000         322
-10    10 sunny        4       15        23      4000         345
-11    11 shady        7        9        28      7000         252
-12    12 shady        8       18        29      8000         522
-13    13 shady        6       17        27      6000         459
-14    14 shady        9       18        28      9000         504
-15    15 shady        8       19        27      8000         513
-16    16 shady        7       19        28      7000         532
-17    17 shady        8       18        29      8000         522
-18    18 shady        9       17        27      9000         459
-19    19 shady        9       19        27      9000         513
-20    20 shady        7       19        29      7000         551</a:t>
+              <a:t># A tibble: 6 × 7
+  index side  weight_g width_cm height_cm weight_mg area_approx
+  &lt;dbl&gt; &lt;chr&gt;    &lt;dbl&gt;    &lt;dbl&gt;     &lt;dbl&gt;     &lt;dbl&gt;       &lt;dbl&gt;
+1     1 sunny        4       12        21      4000         252
+2     2 sunny        3       14        22      3000         308
+3     3 sunny        5       12        21      5000         252
+4     4 sunny        3       13        23      3000         299
+5     5 sunny        4       15        22      4000         330
+6     6 sunny        3       13        23      3000         299</a:t>
             </a:r>
           </a:p>
         </p:txBody>
@@ -22825,17 +23393,17 @@
           <a:p>
             <a:pPr lvl="0"/>
             <a:r>
-              <a:rPr/>
+              <a:rPr b="1"/>
               <a:t>Use </a:t>
             </a:r>
             <a:r>
-              <a:rPr>
+              <a:rPr b="1">
                 <a:latin typeface="Courier"/>
               </a:rPr>
               <a:t>if_else(condition, value_if_true, value_if_false)</a:t>
             </a:r>
             <a:r>
-              <a:rPr/>
+              <a:rPr b="1"/>
               <a:t> to create categories</a:t>
             </a:r>
           </a:p>
